--- a/catalog/samples/lever_effect_table.pptx
+++ b/catalog/samples/lever_effect_table.pptx
@@ -1372,7 +1372,7 @@
           </a:p>
           <a:p>
             <a:r>
-              <a:t>  "template_sha256": "02a27e5dd5a6a390b8fce304c548eb6b434cbc05ab33a4ebbb1aba6c3a67938c"</a:t>
+              <a:t>  "template_sha256": "0ea44ab8d04958cd03a7d367cb8241516d6c22d2cb95258f56e41b631258de23"</a:t>
             </a:r>
           </a:p>
           <a:p>
